--- a/docs/sales/事例調査レポート_提案から契約まで.pptx
+++ b/docs/sales/事例調査レポート_提案から契約まで.pptx
@@ -2220,7 +2220,7 @@
 https://www.ntt.com/business/case-studies/kotohira_town.html
 https://www.ntt.com/business/services/spatial_statistics/case_kyusyu_tourism_promotion.html
 https://www.ntt.com/business/services/spatial_statistics/case_miyaginresearch.html
-https://www.docomobs.com/case/
+https://www.ntttp-db.com/jinryuudx
 https://mobaku.jp/analysis/2017/1101_50.html
 https://bizzine.jp/article/detail/10718
 https://mobaku.jp/
@@ -2416,10 +2416,10 @@
           <a:p>
             <a:r>
               <a:rPr lang="en-US" dirty="0"/>
-              <a:t>ドコモビジネスソリューションズ（旧NTTコム ソリューションズ）は地域の導入支援を担う。ドコモ系の事例は「何が分かったか」の記載が中心で、「なぜ選んだか」が少ないため、選定理由が詳しいKDDIの2事例を比較用に加えた。
+              <a:t>NTTドコモビジネスソリューションズ（2025年7月にドコモビジネスソリューションズから社名変更）は地域の導入支援を担う。淡路島はNTTタウンページがモバイル空間統計と自社の施設データベースを組み合わせた事例。ドコモ系の事例は「何が分かったか」の記載が中心で、「なぜ選んだか」が少ないため、選定理由が詳しいKDDIの2事例を比較用に加えた。
 出典（2026年9月27日 検索で確認）
 https://www.docomobs.com/case/toyama/
-https://www.docomobs.com/case/
+https://www.ntttp-db.com/jinryuudx
 https://www.intage.co.jp/news/6237/
 https://biz.kddi.com/usecase/tochigi2/
 https://k-locationanalyzer.com/case/baystars</a:t>
@@ -3560,7 +3560,7 @@
                 <a:ea typeface="Meiryo" pitchFamily="34" charset="-122"/>
                 <a:cs typeface="Meiryo" pitchFamily="34" charset="-120"/>
               </a:rPr>
-              <a:t>競合4社の比較</a:t>
+              <a:t>競合各社の比較</a:t>
             </a:r>
             <a:endParaRPr lang="en-US" sz="1200" dirty="0"/>
           </a:p>
@@ -4967,7 +4967,7 @@
                 <a:ea typeface="Meiryo" pitchFamily="34" charset="-122"/>
                 <a:cs typeface="Meiryo" pitchFamily="34" charset="-120"/>
               </a:rPr>
-              <a:t>500mメッシュ〜都市部125m</a:t>
+              <a:t>500mメッシュ（一部都市は250m・125m）</a:t>
             </a:r>
             <a:endParaRPr lang="en-US" sz="1050" dirty="0"/>
           </a:p>
@@ -6711,7 +6711,7 @@
                 <a:ea typeface="Meiryo" pitchFamily="34" charset="-122"/>
                 <a:cs typeface="Meiryo" pitchFamily="34" charset="-120"/>
               </a:rPr>
-              <a:t>LINE 月間約9,700万人・Yahoo! JAPAN 約8,500万人の大規模な接点。位置情報と契約者データを掛け合わせた配信</a:t>
+              <a:t>LINE広告は約9,800万人に届くと公式に掲載。ソフトバンクは位置情報と契約者データを掛け合わせた配信を提供</a:t>
             </a:r>
             <a:endParaRPr lang="en-US" sz="1050" dirty="0"/>
           </a:p>
@@ -7370,7 +7370,7 @@
                 <a:ea typeface="Meiryo" pitchFamily="34" charset="-122"/>
                 <a:cs typeface="Meiryo" pitchFamily="34" charset="-120"/>
               </a:rPr>
-              <a:t>国の地域経済分析システム（RESAS）の人口データに採用</a:t>
+              <a:t>国の地域経済分析システム（RESAS）の滞在人口などのデータに採用</a:t>
             </a:r>
             <a:endParaRPr lang="en-US" sz="1200" dirty="0"/>
           </a:p>
@@ -8811,7 +8811,7 @@
                 <a:ea typeface="Meiryo" pitchFamily="34" charset="-122"/>
                 <a:cs typeface="Meiryo" pitchFamily="34" charset="-120"/>
               </a:rPr>
-              <a:t>RESASの人口データもモバイル空間統計です。玉名市様のように、市の単位や国別など、RESASより細かく目的に合わせて見たい場合にお役に立てます。</a:t>
+              <a:t>RESASの滞在人口などのデータもモバイル空間統計です。玉名市様のように、市の単位や国別など、RESASより細かく目的に合わせて見たい場合にお役に立てます。</a:t>
             </a:r>
             <a:endParaRPr lang="en-US" sz="1300" dirty="0"/>
           </a:p>
@@ -11766,7 +11766,7 @@
               <a:buNone/>
             </a:pPr>
             <a:r>
-              <a:rPr lang="en-US" sz="1300" b="1" dirty="0">
+              <a:rPr lang="en-US" sz="1200" b="1" dirty="0">
                 <a:solidFill>
                   <a:srgbClr val="FFFFFF"/>
                 </a:solidFill>
@@ -11774,9 +11774,9 @@
                 <a:ea typeface="Meiryo" pitchFamily="34" charset="-122"/>
                 <a:cs typeface="Meiryo" pitchFamily="34" charset="-120"/>
               </a:rPr>
-              <a:t>商材の機能より「理解・目標・体制」に点がつく</a:t>
-            </a:r>
-            <a:endParaRPr lang="en-US" sz="1300" dirty="0"/>
+              <a:t>最大は「企画」。ただし「理解・目標・体制」にも独立した配点</a:t>
+            </a:r>
+            <a:endParaRPr lang="en-US" sz="1200" dirty="0"/>
           </a:p>
         </p:txBody>
       </p:sp>
@@ -18681,7 +18681,7 @@
                 <a:ea typeface="Meiryo" pitchFamily="34" charset="-122"/>
                 <a:cs typeface="Meiryo" pitchFamily="34" charset="-120"/>
               </a:rPr>
-              <a:t>https://www.docomobs.com/case/</a:t>
+              <a:t>https://www.ntttp-db.com/jinryuudx</a:t>
             </a:r>
             <a:endParaRPr lang="en-US" sz="800" dirty="0"/>
           </a:p>
@@ -21220,7 +21220,7 @@
                 <a:ea typeface="Meiryo" pitchFamily="34" charset="-122"/>
                 <a:cs typeface="Meiryo" pitchFamily="34" charset="-120"/>
               </a:rPr>
-              <a:t>ドコモビジネスソリューションズ・ドコモ本体の事例と、比較のためのKDDI事例</a:t>
+              <a:t>NTTドコモビジネスソリューションズ・販売パートナー・ドコモ本体の事例と、比較のためのKDDI事例</a:t>
             </a:r>
             <a:endParaRPr lang="en-US" sz="1400" dirty="0"/>
           </a:p>
@@ -21638,7 +21638,7 @@
                 <a:ea typeface="Meiryo" pitchFamily="34" charset="-122"/>
                 <a:cs typeface="Meiryo" pitchFamily="34" charset="-120"/>
               </a:rPr>
-              <a:t>淡路島の観光分析</a:t>
+              <a:t>淡路島観光協会</a:t>
             </a:r>
             <a:endParaRPr lang="en-US" sz="1400" dirty="0"/>
           </a:p>
@@ -21730,7 +21730,7 @@
                 <a:ea typeface="Meiryo" pitchFamily="34" charset="-122"/>
                 <a:cs typeface="Meiryo" pitchFamily="34" charset="-120"/>
               </a:rPr>
-              <a:t>観光客の動きと、周辺施設の情報を合わせて見たい</a:t>
+              <a:t>訪日客の実態と、島内の施設との関係を知りたい</a:t>
             </a:r>
             <a:endParaRPr lang="en-US" sz="1100" dirty="0"/>
           </a:p>
@@ -21783,7 +21783,7 @@
                 <a:ea typeface="Meiryo" pitchFamily="34" charset="-122"/>
                 <a:cs typeface="Meiryo" pitchFamily="34" charset="-120"/>
               </a:rPr>
-              <a:t>人の動きと施設の分布を重ねて、観光の動線を分析</a:t>
+              <a:t>国籍別・季節別の訪日客数と、1kmメッシュごとの来訪と施設の関係を分析</a:t>
             </a:r>
             <a:endParaRPr lang="en-US" sz="1100" dirty="0"/>
           </a:p>
@@ -22651,7 +22651,7 @@
                 <a:ea typeface="Meiryo" pitchFamily="34" charset="-122"/>
                 <a:cs typeface="Meiryo" pitchFamily="34" charset="-120"/>
               </a:rPr>
-              <a:t>提供：富山県・淡路島＝ドコモビジネスソリューションズ／川崎フロンターレ＝NTTドコモ・インテージの実証実験／栃木県・横浜DeNA＝KDDI</a:t>
+              <a:t>提供：富山県＝NTTドコモビジネスソリューションズ／淡路島＝NTTタウンページ（販売パートナー）／川崎F＝NTTドコモ・インテージの実証／栃木県・横浜DeNA＝KDDI</a:t>
             </a:r>
             <a:endParaRPr lang="en-US" sz="1000" dirty="0"/>
           </a:p>
@@ -23966,7 +23966,7 @@
                 <a:ea typeface="Meiryo" pitchFamily="34" charset="-122"/>
                 <a:cs typeface="Meiryo" pitchFamily="34" charset="-120"/>
               </a:rPr>
-              <a:t>国の地域経済分析システム（RESAS）では、熊本県全体が最小の単位</a:t>
+              <a:t>国のRESASでは、外国人の分析は熊本県全体が最小の単位</a:t>
             </a:r>
             <a:endParaRPr lang="en-US" sz="1250" dirty="0"/>
           </a:p>
